--- a/BACKUP&RECOVERY/03장/03장_User_Managed_백업.pptx
+++ b/BACKUP&RECOVERY/03장/03장_User_Managed_백업.pptx
@@ -6564,7 +6564,7 @@
                 <a:latin typeface="Consolas"/>
                 <a:ea typeface="Consolas"/>
               </a:rPr>
-              <a:t>SYS@orcl&gt; !cp -v /u01/app/oracle/oradata/ORCL/*.dbf /home/oracle/backup/cold/</a:t>
+              <a:t>SYS@orcl&gt; !cp -v /u01/app/oracle/oradata/orcl/*.dbf /home/oracle/backup/cold/</a:t>
             </a:r>
           </a:p>
           <a:p>
@@ -6581,7 +6581,7 @@
                 <a:latin typeface="Consolas"/>
                 <a:ea typeface="Consolas"/>
               </a:rPr>
-              <a:t>SYS@orcl&gt; !cp -v /u01/app/oracle/oradata/ORCL/*.ctl /home/oracle/backup/cold/</a:t>
+              <a:t>SYS@orcl&gt; !cp -v /u01/app/oracle/oradata/orcl/*.ctl /home/oracle/backup/cold/</a:t>
             </a:r>
           </a:p>
           <a:p>
@@ -6598,7 +6598,7 @@
                 <a:latin typeface="Consolas"/>
                 <a:ea typeface="Consolas"/>
               </a:rPr>
-              <a:t>SYS@orcl&gt; !cp -v /u01/app/oracle/oradata/ORCL/*.log /home/oracle/backup/cold/</a:t>
+              <a:t>SYS@orcl&gt; !cp -v /u01/app/oracle/oradata/orcl/*.log /home/oracle/backup/cold/</a:t>
             </a:r>
           </a:p>
           <a:p>
@@ -6615,7 +6615,7 @@
                 <a:latin typeface="Consolas"/>
                 <a:ea typeface="Consolas"/>
               </a:rPr>
-              <a:t>SYS@orcl&gt; !cp -v /u02/oradata/ORCL/*.log /home/oracle/backup/cold/</a:t>
+              <a:t>SYS@orcl&gt; !cp -v /u02/oradata/orcl/*.log /home/oracle/backup/cold/</a:t>
             </a:r>
           </a:p>
           <a:p>
@@ -8660,7 +8660,7 @@
                 <a:latin typeface="Consolas"/>
                 <a:ea typeface="Consolas"/>
               </a:rPr>
-              <a:t>SYSAUX          /u01/app/oracle/oradata/ORCL/sysaux01.dbf</a:t>
+              <a:t>SYSAUX          /u01/app/oracle/oradata/orcl/sysaux01.dbf</a:t>
             </a:r>
           </a:p>
           <a:p>
@@ -8677,7 +8677,7 @@
                 <a:latin typeface="Consolas"/>
                 <a:ea typeface="Consolas"/>
               </a:rPr>
-              <a:t>SYSTEM          /u01/app/oracle/oradata/ORCL/system01.dbf</a:t>
+              <a:t>SYSTEM          /u01/app/oracle/oradata/orcl/system01.dbf</a:t>
             </a:r>
           </a:p>
           <a:p>
@@ -8694,7 +8694,7 @@
                 <a:latin typeface="Consolas"/>
                 <a:ea typeface="Consolas"/>
               </a:rPr>
-              <a:t>UNDOTBS1        /u01/app/oracle/oradata/ORCL/undotbs01.dbf</a:t>
+              <a:t>UNDOTBS1        /u01/app/oracle/oradata/orcl/undotbs01.dbf</a:t>
             </a:r>
           </a:p>
           <a:p>
@@ -8711,7 +8711,7 @@
                 <a:latin typeface="Consolas"/>
                 <a:ea typeface="Consolas"/>
               </a:rPr>
-              <a:t>USERS           /u01/app/oracle/oradata/ORCL/users01.dbf</a:t>
+              <a:t>USERS           /u01/app/oracle/oradata/orcl/users01.dbf</a:t>
             </a:r>
           </a:p>
           <a:p>
@@ -8881,7 +8881,7 @@
                 <a:latin typeface="Consolas"/>
                 <a:ea typeface="Consolas"/>
               </a:rPr>
-              <a:t>SYS@orcl&gt; !cp -v /u01/app/oracle/oradata/ORCL/users01.dbf /home/oracle/backup/hot/</a:t>
+              <a:t>SYS@orcl&gt; !cp -v /u01/app/oracle/oradata/orcl/users01.dbf /home/oracle/backup/hot/</a:t>
             </a:r>
           </a:p>
           <a:p>
@@ -10674,7 +10674,7 @@
                 <a:latin typeface="Consolas"/>
                 <a:ea typeface="Consolas"/>
               </a:rPr>
-              <a:t>ORA-01110: data file 1: '/u01/app/oracle/oradata/ORCL/system01.dbf'</a:t>
+              <a:t>ORA-01110: data file 1: '/u01/app/oracle/oradata/orcl/system01.dbf'</a:t>
             </a:r>
           </a:p>
           <a:p>
@@ -10810,7 +10810,7 @@
                 <a:latin typeface="Consolas"/>
                 <a:ea typeface="Consolas"/>
               </a:rPr>
-              <a:t>ORA-01110: data file 1: '/u01/app/oracle/oradata/ORCL/system01.dbf'</a:t>
+              <a:t>ORA-01110: data file 1: '/u01/app/oracle/oradata/orcl/system01.dbf'</a:t>
             </a:r>
           </a:p>
           <a:p>
@@ -11534,7 +11534,7 @@
                 <a:latin typeface="Consolas"/>
                 <a:ea typeface="Consolas"/>
               </a:rPr>
-              <a:t>         7 /u01/app/oracle/oradata/ORCL/users01.dbf ACTIVE     2341425 2025-05-09 13:22:14             6.4</a:t>
+              <a:t>         7 /u01/app/oracle/oradata/orcl/users01.dbf ACTIVE     2341425 2025-05-09 13:22:14             6.4</a:t>
             </a:r>
           </a:p>
           <a:p>
@@ -13549,7 +13549,7 @@
                 <a:latin typeface="Consolas"/>
                 <a:ea typeface="Consolas"/>
               </a:rPr>
-              <a:t>SRC=/u01/app/oracle/oradata/ORCL</a:t>
+              <a:t>SRC=/u01/app/oracle/oradata/orcl</a:t>
             </a:r>
           </a:p>
           <a:p>
@@ -13566,7 +13566,7 @@
                 <a:latin typeface="Consolas"/>
                 <a:ea typeface="Consolas"/>
               </a:rPr>
-              <a:t>SRC2=/u02/oradata/ORCL</a:t>
+              <a:t>SRC2=/u02/oradata/orcl</a:t>
             </a:r>
           </a:p>
           <a:p>
